--- a/decks/geog-tectonic-hazards/geog-tectonic-hazards_ch5_chile-nepal.pptx
+++ b/decks/geog-tectonic-hazards/geog-tectonic-hazards_ch5_chile-nepal.pptx
@@ -126,30 +126,30 @@
   <p:extLst>
     <p:ext uri="{521415D9-36F7-43E2-AB2F-B90AF26B5E84}">
       <p14:sectionLst xmlns:p14="http://schemas.microsoft.com/office/powerpoint/2010/main">
-        <p14:section name="Opening" id="{c06c66c4-8e49-89cf-b2f9-b0beb70459fe}">
+        <p14:section name="Opening" id="{65fca914-3013-8f4d-a322-1ca13dafad2e}">
           <p14:sldIdLst>
             <p14:sldId id="256"/>
           </p14:sldIdLst>
         </p14:section>
-        <p14:section name="Gate" id="{749c5c4b-3f8e-c171-a2c9-d79ac4e04248}">
+        <p14:section name="Gate" id="{6276a319-0b02-e5eb-1faa-a4fd3ccc7996}">
           <p14:sldIdLst>
             <p14:sldId id="257"/>
             <p14:sldId id="258"/>
           </p14:sldIdLst>
         </p14:section>
-        <p14:section name="Pre-teach" id="{9fc4894f-9b90-68a1-d8cc-d7ac945a49f9}">
+        <p14:section name="Pre-teach" id="{101022a9-e7f4-679b-4633-b0d17a60ebc9}">
           <p14:sldIdLst>
             <p14:sldId id="259"/>
             <p14:sldId id="260"/>
           </p14:sldIdLst>
         </p14:section>
-        <p14:section name="Read-along" id="{6abb83be-b693-d5d3-e207-745cd9211ece}">
+        <p14:section name="Read-along" id="{071adeba-78ee-626c-16d4-527644b45948}">
           <p14:sldIdLst>
             <p14:sldId id="261"/>
             <p14:sldId id="262"/>
           </p14:sldIdLst>
         </p14:section>
-        <p14:section name="Teach" id="{22357c2b-c3ca-b55c-bb81-9da4105104ef}">
+        <p14:section name="Teach" id="{56054aaa-e598-f33d-0622-207cac273b48}">
           <p14:sldIdLst>
             <p14:sldId id="263"/>
             <p14:sldId id="264"/>
@@ -159,19 +159,19 @@
             <p14:sldId id="268"/>
           </p14:sldIdLst>
         </p14:section>
-        <p14:section name="Routes" id="{fee6caaf-b573-e605-0620-14bca4787530}">
+        <p14:section name="Routes" id="{7cf6e0db-eeb0-c589-6f6a-0fba315b8eef}">
           <p14:sldIdLst>
             <p14:sldId id="269"/>
             <p14:sldId id="270"/>
             <p14:sldId id="271"/>
           </p14:sldIdLst>
         </p14:section>
-        <p14:section name="Close" id="{6dd36b89-2413-154e-a8cc-bae1c9585890}">
+        <p14:section name="Close" id="{d518cc6e-edbf-349a-3f99-5e628258fcf5}">
           <p14:sldIdLst>
             <p14:sldId id="272"/>
           </p14:sldIdLst>
         </p14:section>
-        <p14:section name="Answers" id="{827f8e56-476e-4eb9-5209-dd817f64feaa}">
+        <p14:section name="Answers" id="{32ec935b-4660-6749-c429-9029050e400d}">
           <p14:sldIdLst>
             <p14:sldId id="273"/>
             <p14:sldId id="274"/>
@@ -2260,7 +2260,7 @@
               <a:t>Teach — Primary and secondary effects. Say it in your own words, then check understanding with a quick question: ask a pupil from the pre-teach group first, since they met these words and ideas before the lesson. Pupils try to recall before you re-explain.
 The effects of an earthquake are everything it does to people, property and the environment. Primary effects happen immediately, when the earthquake occurs: the ground shakes, buildings and bridges collapse, roads crack, people are killed and injured by falling masonry. Secondary effects are caused by the primary effects, and they follow afterwards: a tsunami set off by the shaking, landslides from loosened slopes, fires from broken gas pipes, liquefaction of soft ground, disease spreading in crowded camps, businesses and tourism losing income. As a rule, secondary effects make the earthquake last longer, and some of them, a tsunami above all, carry its damage far beyond the area that was shaken.
 Geographers also sort effects into social (people: deaths, injuries, homelessness), economic (money: buildings, businesses, the cost of damage) and environmental (land and water: landslides, pollution, cracked ground). Your mind-map task used both sortings at once: primary social, primary economic, primary environmental, then the same three for secondary effects.
-Your deck's model notes give four examples of where primary and secondary effects were each more significant. In Japan 2011 it was not the shaking but the secondary tsunami that did most of the killing, with almost 20,000 deaths along the east coast. In Haiti 2010 a cholera outbreak followed the earthquake, but most deaths came from collapsing buildings, a primary effect. In Christchurch, New Zealand, in 2011, 181 people died, most from collapsing buildings, yet the longer disruption came from the secondary effect of liquefaction, which killed no one but drove more than 70,000 people out of the city. At Kaikoura, New Zealand, only two people died, but landslides and a tsunami closed the coast road and railway for months, with a lasting economic impact.
+Your lesson gave four examples of where primary and secondary effects were each more significant. In Japan 2011 it was not the shaking but the secondary tsunami that did most of the killing, with almost 20,000 deaths along the east coast. In Haiti 2010 a cholera outbreak followed the earthquake, but most deaths came from collapsing buildings, a primary effect. In Christchurch, New Zealand, in 2011, 181 people died, most from collapsing buildings, yet the longer disruption came from the secondary effect of liquefaction, which killed no one but drove more than 70,000 people out of the city. At Kaikoura, New Zealand, only two people died, but landslides and a tsunami closed the coast road and railway for months, with a lasting economic impact.
 Tip: Primary: in the moment, by the shaking. Secondary: afterwards, because of the primary effects. If you can put the word because before it, it is probably secondary.</a:t>
             </a:r>
             <a:endParaRPr lang="en-US" dirty="0"/>
@@ -17597,7 +17597,7 @@
                 <a:ea typeface="Calibri" pitchFamily="34" charset="-122"/>
                 <a:cs typeface="Calibri" pitchFamily="34" charset="-120"/>
               </a:rPr>
-              <a:t>Your deck's model notes give four examples of where primary and secondary effects were each more significant.</a:t>
+              <a:t>Your lesson gave four examples of where primary and secondary effects were each more significant.</a:t>
             </a:r>
             <a:endParaRPr lang="en-US" sz="1800" dirty="0"/>
           </a:p>
